--- a/dist/초1/수학/수와연산/초1_수학_수와연산_05_뺄셈의뜻.pptx
+++ b/dist/초1/수학/수와연산/초1_수학_수와연산_05_뺄셈의뜻.pptx
@@ -120,13 +120,13 @@
   <p:extLst>
     <p:ext uri="{521415D9-36F7-43E2-AB2F-B90AF26B5E84}">
       <p14:sectionLst xmlns:p14="http://schemas.microsoft.com/office/powerpoint/2010/main">
-        <p14:section name="도입" id="{e92c5d68-4e40-151f-cc39-64d899406927}">
+        <p14:section name="도입" id="{702e80ea-35eb-654e-c951-4d329e917af5}">
           <p14:sldIdLst>
             <p14:sldId id="256"/>
             <p14:sldId id="257"/>
           </p14:sldIdLst>
         </p14:section>
-        <p14:section name="개념" id="{fdb8c9f9-d38b-e175-05b4-e66855f10244}">
+        <p14:section name="개념" id="{b0cbc581-5214-e7a0-3342-fe6ac15e10b2}">
           <p14:sldIdLst>
             <p14:sldId id="258"/>
             <p14:sldId id="259"/>
@@ -134,26 +134,26 @@
             <p14:sldId id="261"/>
           </p14:sldIdLst>
         </p14:section>
-        <p14:section name="연습" id="{2eda7553-649b-d6ac-162d-c6d8c3e6d165}">
+        <p14:section name="연습" id="{e83c05cd-fe48-7b6f-cfd3-a759d6728520}">
           <p14:sldIdLst>
             <p14:sldId id="262"/>
             <p14:sldId id="263"/>
             <p14:sldId id="264"/>
           </p14:sldIdLst>
         </p14:section>
-        <p14:section name="확인" id="{a548041b-a9cc-9aa9-0c07-6cb35fb66aee}">
+        <p14:section name="확인" id="{108719f7-e07e-ca68-8ee2-4f1a37428207}">
           <p14:sldIdLst>
             <p14:sldId id="265"/>
             <p14:sldId id="266"/>
             <p14:sldId id="267"/>
           </p14:sldIdLst>
         </p14:section>
-        <p14:section name="정리" id="{707ba8f8-5a96-fb34-9f26-edf540e5ed05}">
+        <p14:section name="정리" id="{9ba7e1dc-2163-84cd-8485-0b27b0e5f603}">
           <p14:sldIdLst>
             <p14:sldId id="268"/>
           </p14:sldIdLst>
         </p14:section>
-        <p14:section name="보충" id="{644bf7db-e7e1-ebbf-0261-30e179290a81}">
+        <p14:section name="보충" id="{851ba62e-7030-1284-2644-c0682fdf5720}">
           <p14:sldIdLst>
             <p14:sldId id="269"/>
           </p14:sldIdLst>
@@ -2957,7 +2957,7 @@
           <a:bodyPr wrap="square" lIns="0" tIns="0" rIns="0" bIns="0" rtlCol="0" anchor="ctr"/>
           <a:lstStyle/>
           <a:p>
-            <a:pPr algn="l" indent="0" marL="0">
+            <a:pPr eaLnBrk="0" algn="l" indent="0" marL="0">
               <a:buNone/>
             </a:pPr>
             <a:r>
@@ -2998,7 +2998,7 @@
           <a:bodyPr wrap="square" lIns="0" tIns="0" rIns="0" bIns="0" rtlCol="0" anchor="t"/>
           <a:lstStyle/>
           <a:p>
-            <a:pPr indent="0" marL="0">
+            <a:pPr eaLnBrk="0" indent="0" marL="0">
               <a:buNone/>
             </a:pPr>
             <a:r>
@@ -3393,7 +3393,7 @@
       </p:sp>
       <p:sp>
         <p:nvSpPr>
-          <p:cNvPr id="19" name="S01-figure16" descr="십 칸 틀에 5개"/>
+          <p:cNvPr id="19" name="S01-figure16" descr="1개의 십 칸 틀 중 1번째: 모두 5개"/>
           <p:cNvSpPr/>
           <p:nvPr/>
         </p:nvSpPr>
@@ -3745,7 +3745,7 @@
       </p:sp>
       <p:sp>
         <p:nvSpPr>
-          <p:cNvPr id="33" name="S01-figure30" descr="십 칸 틀에 3개"/>
+          <p:cNvPr id="33" name="S01-figure30" descr="1개의 십 칸 틀 중 1번째: 모두 3개"/>
           <p:cNvSpPr/>
           <p:nvPr/>
         </p:nvSpPr>
@@ -3818,7 +3818,7 @@
           <a:bodyPr wrap="square" lIns="0" tIns="0" rIns="0" bIns="0" rtlCol="0" anchor="ctr"/>
           <a:lstStyle/>
           <a:p>
-            <a:pPr indent="0" marL="0">
+            <a:pPr eaLnBrk="0" indent="0" marL="0">
               <a:spcAft>
                 <a:spcPts val="600"/>
               </a:spcAft>
@@ -3838,7 +3838,7 @@
             <a:endParaRPr lang="ko-KR" sz="3200" dirty="0"/>
           </a:p>
           <a:p>
-            <a:pPr indent="0" marL="0">
+            <a:pPr eaLnBrk="0" indent="0" marL="0">
               <a:spcAft>
                 <a:spcPts val="600"/>
               </a:spcAft>
@@ -3858,7 +3858,7 @@
             <a:endParaRPr lang="ko-KR" sz="3200" dirty="0"/>
           </a:p>
           <a:p>
-            <a:pPr indent="0" marL="0">
+            <a:pPr eaLnBrk="0" indent="0" marL="0">
               <a:spcAft>
                 <a:spcPts val="600"/>
               </a:spcAft>
@@ -3927,7 +3927,7 @@
           <a:bodyPr wrap="square" lIns="0" tIns="0" rIns="0" bIns="0" rtlCol="0" anchor="ctr"/>
           <a:lstStyle/>
           <a:p>
-            <a:pPr algn="l" indent="0" marL="0">
+            <a:pPr eaLnBrk="0" algn="l" indent="0" marL="0">
               <a:buNone/>
             </a:pPr>
             <a:r>
@@ -3966,7 +3966,7 @@
           <a:bodyPr wrap="square" lIns="0" tIns="0" rIns="0" bIns="0" rtlCol="0" anchor="ctr"/>
           <a:lstStyle/>
           <a:p>
-            <a:pPr algn="l" indent="0" marL="0">
+            <a:pPr eaLnBrk="0" algn="l" indent="0" marL="0">
               <a:buNone/>
             </a:pPr>
             <a:r>
@@ -4013,7 +4013,7 @@
           <a:bodyPr wrap="square" lIns="0" tIns="0" rIns="0" bIns="0" rtlCol="0" anchor="ctr"/>
           <a:lstStyle/>
           <a:p>
-            <a:pPr algn="ctr" indent="0" marL="0">
+            <a:pPr eaLnBrk="0" algn="ctr" indent="0" marL="0">
               <a:buNone/>
             </a:pPr>
             <a:r>
@@ -4052,7 +4052,7 @@
           <a:bodyPr wrap="square" lIns="0" tIns="0" rIns="0" bIns="0" rtlCol="0" anchor="ctr"/>
           <a:lstStyle/>
           <a:p>
-            <a:pPr algn="l" indent="0" marL="0">
+            <a:pPr eaLnBrk="0" algn="l" indent="0" marL="0">
               <a:buNone/>
             </a:pPr>
             <a:r>
@@ -4099,7 +4099,7 @@
           <a:bodyPr wrap="square" lIns="0" tIns="0" rIns="0" bIns="0" rtlCol="0" anchor="ctr"/>
           <a:lstStyle/>
           <a:p>
-            <a:pPr algn="ctr" indent="0" marL="0">
+            <a:pPr eaLnBrk="0" algn="ctr" indent="0" marL="0">
               <a:buNone/>
             </a:pPr>
             <a:r>
@@ -4138,7 +4138,7 @@
           <a:bodyPr wrap="square" lIns="0" tIns="0" rIns="0" bIns="0" rtlCol="0" anchor="ctr"/>
           <a:lstStyle/>
           <a:p>
-            <a:pPr algn="l" indent="0" marL="0">
+            <a:pPr eaLnBrk="0" algn="l" indent="0" marL="0">
               <a:buNone/>
             </a:pPr>
             <a:r>
@@ -4185,7 +4185,7 @@
           <a:bodyPr wrap="square" lIns="0" tIns="0" rIns="0" bIns="0" rtlCol="0" anchor="ctr"/>
           <a:lstStyle/>
           <a:p>
-            <a:pPr algn="ctr" indent="0" marL="0">
+            <a:pPr eaLnBrk="0" algn="ctr" indent="0" marL="0">
               <a:buNone/>
             </a:pPr>
             <a:r>
@@ -4224,7 +4224,7 @@
           <a:bodyPr wrap="square" lIns="0" tIns="0" rIns="0" bIns="0" rtlCol="0" anchor="ctr"/>
           <a:lstStyle/>
           <a:p>
-            <a:pPr algn="l" indent="0" marL="0">
+            <a:pPr eaLnBrk="0" algn="l" indent="0" marL="0">
               <a:buNone/>
             </a:pPr>
             <a:r>
@@ -4281,7 +4281,7 @@
             </a:lvl1pPr>
           </a:lstStyle>
           <a:p>
-            <a:pPr algn="r"/>
+            <a:pPr eaLnBrk="0" algn="r"/>
             <a:fld id="{F7021451-1387-4CA6-816F-3879F97B5CBC}" type="slidenum">
               <a:rPr b="0" lang="en-US"/>
               <a:t>10</a:t>
@@ -4338,7 +4338,7 @@
           <a:bodyPr wrap="square" lIns="0" tIns="0" rIns="0" bIns="0" rtlCol="0" anchor="ctr"/>
           <a:lstStyle/>
           <a:p>
-            <a:pPr algn="l" indent="0" marL="0">
+            <a:pPr eaLnBrk="0" algn="l" indent="0" marL="0">
               <a:buNone/>
             </a:pPr>
             <a:r>
@@ -4404,7 +4404,7 @@
           <a:bodyPr wrap="square" lIns="0" tIns="0" rIns="0" bIns="0" rtlCol="0" anchor="ctr"/>
           <a:lstStyle/>
           <a:p>
-            <a:pPr indent="0" marL="0">
+            <a:pPr eaLnBrk="0" indent="0" marL="0">
               <a:spcAft>
                 <a:spcPts val="600"/>
               </a:spcAft>
@@ -4454,7 +4454,7 @@
           <a:bodyPr wrap="square" lIns="177800" tIns="0" rIns="177800" bIns="0" rtlCol="0" anchor="ctr"/>
           <a:lstStyle/>
           <a:p>
-            <a:pPr algn="l" indent="0" marL="0">
+            <a:pPr eaLnBrk="0" algn="l" indent="0" marL="0">
               <a:buNone/>
             </a:pPr>
             <a:r>
@@ -4493,7 +4493,7 @@
           <a:bodyPr wrap="square" lIns="0" tIns="0" rIns="0" bIns="0" rtlCol="0" anchor="ctr"/>
           <a:lstStyle/>
           <a:p>
-            <a:pPr algn="l" indent="0" marL="0">
+            <a:pPr eaLnBrk="0" algn="l" indent="0" marL="0">
               <a:buNone/>
             </a:pPr>
             <a:r>
@@ -4532,7 +4532,7 @@
           <a:bodyPr wrap="square" lIns="0" tIns="0" rIns="0" bIns="0" rtlCol="0" anchor="ctr"/>
           <a:lstStyle/>
           <a:p>
-            <a:pPr algn="l" indent="0" marL="0">
+            <a:pPr eaLnBrk="0" algn="l" indent="0" marL="0">
               <a:buNone/>
             </a:pPr>
             <a:r>
@@ -4571,7 +4571,7 @@
           <a:bodyPr wrap="square" lIns="0" tIns="0" rIns="0" bIns="0" rtlCol="0" anchor="ctr"/>
           <a:lstStyle/>
           <a:p>
-            <a:pPr algn="l" indent="0" marL="0">
+            <a:pPr eaLnBrk="0" algn="l" indent="0" marL="0">
               <a:buNone/>
             </a:pPr>
             <a:r>
@@ -4610,7 +4610,7 @@
           <a:bodyPr wrap="square" lIns="0" tIns="0" rIns="0" bIns="0" rtlCol="0" anchor="ctr"/>
           <a:lstStyle/>
           <a:p>
-            <a:pPr algn="l" indent="0" marL="0">
+            <a:pPr eaLnBrk="0" algn="l" indent="0" marL="0">
               <a:buNone/>
             </a:pPr>
             <a:r>
@@ -4649,7 +4649,7 @@
           <a:bodyPr wrap="square" lIns="0" tIns="0" rIns="0" bIns="0" rtlCol="0" anchor="ctr"/>
           <a:lstStyle/>
           <a:p>
-            <a:pPr algn="l" indent="0" marL="0">
+            <a:pPr eaLnBrk="0" algn="l" indent="0" marL="0">
               <a:buNone/>
             </a:pPr>
             <a:r>
@@ -4688,7 +4688,7 @@
           <a:bodyPr wrap="square" lIns="0" tIns="0" rIns="0" bIns="0" rtlCol="0" anchor="ctr"/>
           <a:lstStyle/>
           <a:p>
-            <a:pPr algn="l" indent="0" marL="0">
+            <a:pPr eaLnBrk="0" algn="l" indent="0" marL="0">
               <a:buNone/>
             </a:pPr>
             <a:r>
@@ -4735,7 +4735,7 @@
           <a:bodyPr wrap="square" lIns="177800" tIns="0" rIns="177800" bIns="0" rtlCol="0" anchor="ctr"/>
           <a:lstStyle/>
           <a:p>
-            <a:pPr algn="l" indent="0" marL="0">
+            <a:pPr eaLnBrk="0" algn="l" indent="0" marL="0">
               <a:buNone/>
             </a:pPr>
             <a:r>
@@ -4774,7 +4774,7 @@
           <a:bodyPr wrap="square" lIns="0" tIns="0" rIns="0" bIns="0" rtlCol="0" anchor="ctr"/>
           <a:lstStyle/>
           <a:p>
-            <a:pPr algn="l" indent="0" marL="0">
+            <a:pPr eaLnBrk="0" algn="l" indent="0" marL="0">
               <a:buNone/>
             </a:pPr>
             <a:r>
@@ -4813,7 +4813,7 @@
           <a:bodyPr wrap="square" lIns="0" tIns="0" rIns="0" bIns="0" rtlCol="0" anchor="ctr"/>
           <a:lstStyle/>
           <a:p>
-            <a:pPr algn="l" indent="0" marL="0">
+            <a:pPr eaLnBrk="0" algn="l" indent="0" marL="0">
               <a:buNone/>
             </a:pPr>
             <a:r>
@@ -4852,7 +4852,7 @@
           <a:bodyPr wrap="square" lIns="0" tIns="0" rIns="0" bIns="0" rtlCol="0" anchor="ctr"/>
           <a:lstStyle/>
           <a:p>
-            <a:pPr algn="l" indent="0" marL="0">
+            <a:pPr eaLnBrk="0" algn="l" indent="0" marL="0">
               <a:buNone/>
             </a:pPr>
             <a:r>
@@ -4891,7 +4891,7 @@
           <a:bodyPr wrap="square" lIns="0" tIns="0" rIns="0" bIns="0" rtlCol="0" anchor="ctr"/>
           <a:lstStyle/>
           <a:p>
-            <a:pPr algn="l" indent="0" marL="0">
+            <a:pPr eaLnBrk="0" algn="l" indent="0" marL="0">
               <a:buNone/>
             </a:pPr>
             <a:r>
@@ -4930,7 +4930,7 @@
           <a:bodyPr wrap="square" lIns="0" tIns="0" rIns="0" bIns="0" rtlCol="0" anchor="ctr"/>
           <a:lstStyle/>
           <a:p>
-            <a:pPr algn="l" indent="0" marL="0">
+            <a:pPr eaLnBrk="0" algn="l" indent="0" marL="0">
               <a:buNone/>
             </a:pPr>
             <a:r>
@@ -4969,7 +4969,7 @@
           <a:bodyPr wrap="square" lIns="0" tIns="0" rIns="0" bIns="0" rtlCol="0" anchor="ctr"/>
           <a:lstStyle/>
           <a:p>
-            <a:pPr algn="l" indent="0" marL="0">
+            <a:pPr eaLnBrk="0" algn="l" indent="0" marL="0">
               <a:buNone/>
             </a:pPr>
             <a:r>
@@ -5026,7 +5026,7 @@
             </a:lvl1pPr>
           </a:lstStyle>
           <a:p>
-            <a:pPr algn="r"/>
+            <a:pPr eaLnBrk="0" algn="r"/>
             <a:fld id="{F7021451-1387-4CA6-816F-3879F97B5CBC}" type="slidenum">
               <a:rPr b="0" lang="en-US"/>
               <a:t>11</a:t>
@@ -5083,7 +5083,7 @@
           <a:bodyPr wrap="square" lIns="0" tIns="0" rIns="0" bIns="0" rtlCol="0" anchor="ctr"/>
           <a:lstStyle/>
           <a:p>
-            <a:pPr algn="l" indent="0" marL="0">
+            <a:pPr eaLnBrk="0" algn="l" indent="0" marL="0">
               <a:buNone/>
             </a:pPr>
             <a:r>
@@ -5122,7 +5122,7 @@
           <a:bodyPr wrap="square" lIns="0" tIns="0" rIns="0" bIns="0" rtlCol="0" anchor="ctr"/>
           <a:lstStyle/>
           <a:p>
-            <a:pPr algn="l" indent="0" marL="0">
+            <a:pPr eaLnBrk="0" algn="l" indent="0" marL="0">
               <a:buNone/>
             </a:pPr>
             <a:r>
@@ -5188,7 +5188,7 @@
           <a:bodyPr wrap="square" lIns="0" tIns="0" rIns="0" bIns="0" rtlCol="0" anchor="ctr"/>
           <a:lstStyle/>
           <a:p>
-            <a:pPr indent="0" marL="0">
+            <a:pPr eaLnBrk="0" indent="0" marL="0">
               <a:spcAft>
                 <a:spcPts val="600"/>
               </a:spcAft>
@@ -5238,7 +5238,7 @@
           <a:bodyPr wrap="square" lIns="0" tIns="0" rIns="0" bIns="0" rtlCol="0" anchor="ctr"/>
           <a:lstStyle/>
           <a:p>
-            <a:pPr algn="ctr" indent="0" marL="0">
+            <a:pPr eaLnBrk="0" algn="ctr" indent="0" marL="0">
               <a:buNone/>
             </a:pPr>
             <a:r>
@@ -5304,7 +5304,7 @@
           <a:bodyPr wrap="square" lIns="0" tIns="0" rIns="0" bIns="0" rtlCol="0" anchor="ctr"/>
           <a:lstStyle/>
           <a:p>
-            <a:pPr indent="0" marL="0">
+            <a:pPr eaLnBrk="0" indent="0" marL="0">
               <a:spcAft>
                 <a:spcPts val="600"/>
               </a:spcAft>
@@ -5354,7 +5354,7 @@
           <a:bodyPr wrap="square" lIns="0" tIns="0" rIns="0" bIns="0" rtlCol="0" anchor="ctr"/>
           <a:lstStyle/>
           <a:p>
-            <a:pPr algn="ctr" indent="0" marL="0">
+            <a:pPr eaLnBrk="0" algn="ctr" indent="0" marL="0">
               <a:buNone/>
             </a:pPr>
             <a:r>
@@ -5420,7 +5420,7 @@
           <a:bodyPr wrap="square" lIns="0" tIns="0" rIns="0" bIns="0" rtlCol="0" anchor="ctr"/>
           <a:lstStyle/>
           <a:p>
-            <a:pPr indent="0" marL="0">
+            <a:pPr eaLnBrk="0" indent="0" marL="0">
               <a:spcAft>
                 <a:spcPts val="600"/>
               </a:spcAft>
@@ -5470,7 +5470,7 @@
           <a:bodyPr wrap="square" lIns="0" tIns="0" rIns="0" bIns="0" rtlCol="0" anchor="ctr"/>
           <a:lstStyle/>
           <a:p>
-            <a:pPr algn="ctr" indent="0" marL="0">
+            <a:pPr eaLnBrk="0" algn="ctr" indent="0" marL="0">
               <a:buNone/>
             </a:pPr>
             <a:r>
@@ -5536,7 +5536,7 @@
           <a:bodyPr wrap="square" lIns="0" tIns="0" rIns="0" bIns="0" rtlCol="0" anchor="ctr"/>
           <a:lstStyle/>
           <a:p>
-            <a:pPr indent="0" marL="0">
+            <a:pPr eaLnBrk="0" indent="0" marL="0">
               <a:spcAft>
                 <a:spcPts val="600"/>
               </a:spcAft>
@@ -5596,7 +5596,7 @@
             </a:lvl1pPr>
           </a:lstStyle>
           <a:p>
-            <a:pPr algn="r"/>
+            <a:pPr eaLnBrk="0" algn="r"/>
             <a:fld id="{F7021451-1387-4CA6-816F-3879F97B5CBC}" type="slidenum">
               <a:rPr b="0" lang="en-US"/>
               <a:t>12</a:t>
@@ -5653,7 +5653,7 @@
           <a:bodyPr wrap="square" lIns="0" tIns="0" rIns="0" bIns="0" rtlCol="0" anchor="ctr"/>
           <a:lstStyle/>
           <a:p>
-            <a:pPr algn="l" indent="0" marL="0">
+            <a:pPr eaLnBrk="0" algn="l" indent="0" marL="0">
               <a:buNone/>
             </a:pPr>
             <a:r>
@@ -5719,7 +5719,7 @@
           <a:bodyPr wrap="square" lIns="0" tIns="0" rIns="0" bIns="0" rtlCol="0" anchor="ctr"/>
           <a:lstStyle/>
           <a:p>
-            <a:pPr indent="0" marL="0">
+            <a:pPr eaLnBrk="0" indent="0" marL="0">
               <a:spcAft>
                 <a:spcPts val="600"/>
               </a:spcAft>
@@ -5769,7 +5769,7 @@
           <a:bodyPr wrap="square" lIns="177800" tIns="0" rIns="177800" bIns="0" rtlCol="0" anchor="ctr"/>
           <a:lstStyle/>
           <a:p>
-            <a:pPr algn="l" indent="0" marL="0">
+            <a:pPr eaLnBrk="0" algn="l" indent="0" marL="0">
               <a:buNone/>
             </a:pPr>
             <a:r>
@@ -5816,7 +5816,7 @@
           <a:bodyPr wrap="square" lIns="177800" tIns="0" rIns="177800" bIns="0" rtlCol="0" anchor="ctr"/>
           <a:lstStyle/>
           <a:p>
-            <a:pPr algn="l" indent="0" marL="0">
+            <a:pPr eaLnBrk="0" algn="l" indent="0" marL="0">
               <a:buNone/>
             </a:pPr>
             <a:r>
@@ -5855,7 +5855,7 @@
           <a:bodyPr wrap="square" lIns="0" tIns="0" rIns="0" bIns="0" rtlCol="0" anchor="t"/>
           <a:lstStyle/>
           <a:p>
-            <a:pPr algn="l" indent="0" marL="0">
+            <a:pPr eaLnBrk="0" algn="l" indent="0" marL="0">
               <a:buNone/>
             </a:pPr>
             <a:r>
@@ -5894,7 +5894,7 @@
           <a:bodyPr wrap="square" lIns="0" tIns="0" rIns="0" bIns="0" rtlCol="0" anchor="ctr"/>
           <a:lstStyle/>
           <a:p>
-            <a:pPr algn="l" indent="0" marL="0">
+            <a:pPr eaLnBrk="0" algn="l" indent="0" marL="0">
               <a:buNone/>
             </a:pPr>
             <a:r>
@@ -5933,7 +5933,7 @@
           <a:bodyPr wrap="square" lIns="0" tIns="0" rIns="0" bIns="0" rtlCol="0" anchor="ctr"/>
           <a:lstStyle/>
           <a:p>
-            <a:pPr algn="l" indent="0" marL="0">
+            <a:pPr eaLnBrk="0" algn="l" indent="0" marL="0">
               <a:buNone/>
             </a:pPr>
             <a:r>
@@ -5972,7 +5972,7 @@
           <a:bodyPr wrap="square" lIns="0" tIns="0" rIns="0" bIns="0" rtlCol="0" anchor="ctr"/>
           <a:lstStyle/>
           <a:p>
-            <a:pPr algn="l" indent="0" marL="0">
+            <a:pPr eaLnBrk="0" algn="l" indent="0" marL="0">
               <a:buNone/>
             </a:pPr>
             <a:r>
@@ -6011,7 +6011,7 @@
           <a:bodyPr wrap="square" lIns="0" tIns="0" rIns="0" bIns="0" rtlCol="0" anchor="ctr"/>
           <a:lstStyle/>
           <a:p>
-            <a:pPr algn="l" indent="0" marL="0">
+            <a:pPr eaLnBrk="0" algn="l" indent="0" marL="0">
               <a:buNone/>
             </a:pPr>
             <a:r>
@@ -6068,7 +6068,7 @@
             </a:lvl1pPr>
           </a:lstStyle>
           <a:p>
-            <a:pPr algn="r"/>
+            <a:pPr eaLnBrk="0" algn="r"/>
             <a:fld id="{F7021451-1387-4CA6-816F-3879F97B5CBC}" type="slidenum">
               <a:rPr b="0" lang="en-US"/>
               <a:t>13</a:t>
@@ -6125,7 +6125,7 @@
           <a:bodyPr wrap="square" lIns="0" tIns="0" rIns="0" bIns="0" rtlCol="0" anchor="ctr"/>
           <a:lstStyle/>
           <a:p>
-            <a:pPr algn="l" indent="0" marL="0">
+            <a:pPr eaLnBrk="0" algn="l" indent="0" marL="0">
               <a:buNone/>
             </a:pPr>
             <a:r>
@@ -6164,7 +6164,7 @@
           <a:bodyPr wrap="square" lIns="0" tIns="0" rIns="0" bIns="0" rtlCol="0" anchor="ctr"/>
           <a:lstStyle/>
           <a:p>
-            <a:pPr algn="l" indent="0" marL="0">
+            <a:pPr eaLnBrk="0" algn="l" indent="0" marL="0">
               <a:buNone/>
             </a:pPr>
             <a:r>
@@ -6230,7 +6230,7 @@
           <a:bodyPr wrap="square" lIns="0" tIns="0" rIns="0" bIns="0" rtlCol="0" anchor="ctr"/>
           <a:lstStyle/>
           <a:p>
-            <a:pPr indent="0" marL="0">
+            <a:pPr eaLnBrk="0" indent="0" marL="0">
               <a:spcAft>
                 <a:spcPts val="600"/>
               </a:spcAft>
@@ -6351,7 +6351,7 @@
           <a:bodyPr wrap="square" lIns="0" tIns="0" rIns="0" bIns="0" rtlCol="0" anchor="ctr"/>
           <a:lstStyle/>
           <a:p>
-            <a:pPr algn="ctr" indent="0" marL="0">
+            <a:pPr eaLnBrk="0" algn="ctr" indent="0" marL="0">
               <a:buNone/>
             </a:pPr>
             <a:r>
@@ -6519,7 +6519,7 @@
           <a:bodyPr wrap="square" lIns="0" tIns="0" rIns="0" bIns="0" rtlCol="0" anchor="ctr"/>
           <a:lstStyle/>
           <a:p>
-            <a:pPr algn="ctr" indent="0" marL="0">
+            <a:pPr eaLnBrk="0" algn="ctr" indent="0" marL="0">
               <a:buNone/>
             </a:pPr>
             <a:r>
@@ -6576,7 +6576,7 @@
             </a:lvl1pPr>
           </a:lstStyle>
           <a:p>
-            <a:pPr algn="r"/>
+            <a:pPr eaLnBrk="0" algn="r"/>
             <a:fld id="{F7021451-1387-4CA6-816F-3879F97B5CBC}" type="slidenum">
               <a:rPr b="0" lang="en-US"/>
               <a:t>14</a:t>
@@ -6633,7 +6633,7 @@
           <a:bodyPr wrap="square" lIns="0" tIns="0" rIns="0" bIns="0" rtlCol="0" anchor="ctr"/>
           <a:lstStyle/>
           <a:p>
-            <a:pPr algn="l" indent="0" marL="0">
+            <a:pPr eaLnBrk="0" algn="l" indent="0" marL="0">
               <a:buNone/>
             </a:pPr>
             <a:r>
@@ -6680,7 +6680,7 @@
           <a:bodyPr wrap="square" lIns="0" tIns="0" rIns="0" bIns="0" rtlCol="0" anchor="ctr"/>
           <a:lstStyle/>
           <a:p>
-            <a:pPr algn="ctr" indent="0" marL="0">
+            <a:pPr eaLnBrk="0" algn="ctr" indent="0" marL="0">
               <a:buNone/>
             </a:pPr>
             <a:r>
@@ -6719,7 +6719,7 @@
           <a:bodyPr wrap="square" lIns="0" tIns="0" rIns="0" bIns="0" rtlCol="0" anchor="ctr"/>
           <a:lstStyle/>
           <a:p>
-            <a:pPr algn="l" indent="0" marL="0">
+            <a:pPr eaLnBrk="0" algn="l" indent="0" marL="0">
               <a:buNone/>
             </a:pPr>
             <a:r>
@@ -6766,7 +6766,7 @@
           <a:bodyPr wrap="square" lIns="0" tIns="0" rIns="0" bIns="0" rtlCol="0" anchor="ctr"/>
           <a:lstStyle/>
           <a:p>
-            <a:pPr algn="ctr" indent="0" marL="0">
+            <a:pPr eaLnBrk="0" algn="ctr" indent="0" marL="0">
               <a:buNone/>
             </a:pPr>
             <a:r>
@@ -6805,7 +6805,7 @@
           <a:bodyPr wrap="square" lIns="0" tIns="0" rIns="0" bIns="0" rtlCol="0" anchor="ctr"/>
           <a:lstStyle/>
           <a:p>
-            <a:pPr algn="l" indent="0" marL="0">
+            <a:pPr eaLnBrk="0" algn="l" indent="0" marL="0">
               <a:buNone/>
             </a:pPr>
             <a:r>
@@ -6852,7 +6852,7 @@
           <a:bodyPr wrap="square" lIns="0" tIns="0" rIns="0" bIns="0" rtlCol="0" anchor="ctr"/>
           <a:lstStyle/>
           <a:p>
-            <a:pPr algn="ctr" indent="0" marL="0">
+            <a:pPr eaLnBrk="0" algn="ctr" indent="0" marL="0">
               <a:buNone/>
             </a:pPr>
             <a:r>
@@ -6891,7 +6891,7 @@
           <a:bodyPr wrap="square" lIns="0" tIns="0" rIns="0" bIns="0" rtlCol="0" anchor="ctr"/>
           <a:lstStyle/>
           <a:p>
-            <a:pPr algn="ctr" indent="0" marL="0">
+            <a:pPr eaLnBrk="0" algn="ctr" indent="0" marL="0">
               <a:buNone/>
             </a:pPr>
             <a:r>
@@ -6908,7 +6908,7 @@
             <a:endParaRPr lang="ko-KR" sz="2600" dirty="0"/>
           </a:p>
           <a:p>
-            <a:pPr algn="ctr" indent="0" marL="0">
+            <a:pPr eaLnBrk="0" algn="ctr" indent="0" marL="0">
               <a:buNone/>
             </a:pPr>
             <a:r>
@@ -6925,7 +6925,7 @@
             <a:endParaRPr lang="ko-KR" sz="2600" dirty="0"/>
           </a:p>
           <a:p>
-            <a:pPr algn="ctr" indent="0" marL="0">
+            <a:pPr eaLnBrk="0" algn="ctr" indent="0" marL="0">
               <a:buNone/>
             </a:pPr>
             <a:r>
@@ -6982,7 +6982,7 @@
             </a:lvl1pPr>
           </a:lstStyle>
           <a:p>
-            <a:pPr algn="r"/>
+            <a:pPr eaLnBrk="0" algn="r"/>
             <a:fld id="{F7021451-1387-4CA6-816F-3879F97B5CBC}" type="slidenum">
               <a:rPr b="0" lang="en-US"/>
               <a:t>2</a:t>
@@ -7039,7 +7039,7 @@
           <a:bodyPr wrap="square" lIns="0" tIns="0" rIns="0" bIns="0" rtlCol="0" anchor="ctr"/>
           <a:lstStyle/>
           <a:p>
-            <a:pPr algn="l" indent="0" marL="0">
+            <a:pPr eaLnBrk="0" algn="l" indent="0" marL="0">
               <a:buNone/>
             </a:pPr>
             <a:r>
@@ -7078,7 +7078,7 @@
           <a:bodyPr wrap="square" lIns="0" tIns="0" rIns="0" bIns="0" rtlCol="0" anchor="ctr"/>
           <a:lstStyle/>
           <a:p>
-            <a:pPr algn="l" indent="0" marL="0">
+            <a:pPr eaLnBrk="0" algn="l" indent="0" marL="0">
               <a:buNone/>
             </a:pPr>
             <a:r>
@@ -7144,7 +7144,7 @@
           <a:bodyPr wrap="square" lIns="0" tIns="0" rIns="0" bIns="0" rtlCol="0" anchor="ctr"/>
           <a:lstStyle/>
           <a:p>
-            <a:pPr indent="0" marL="0">
+            <a:pPr eaLnBrk="0" indent="0" marL="0">
               <a:spcAft>
                 <a:spcPts val="600"/>
               </a:spcAft>
@@ -7164,7 +7164,7 @@
             <a:endParaRPr lang="ko-KR" sz="3200" dirty="0"/>
           </a:p>
           <a:p>
-            <a:pPr indent="0" marL="0">
+            <a:pPr eaLnBrk="0" indent="0" marL="0">
               <a:spcAft>
                 <a:spcPts val="600"/>
               </a:spcAft>
@@ -7562,7 +7562,7 @@
       </p:sp>
       <p:sp>
         <p:nvSpPr>
-          <p:cNvPr id="21" name="S03-figure57" descr="십 칸 틀에 5개"/>
+          <p:cNvPr id="21" name="S03-figure57" descr="1개의 십 칸 틀 중 1번째: 모두 5개"/>
           <p:cNvSpPr/>
           <p:nvPr/>
         </p:nvSpPr>
@@ -7608,7 +7608,7 @@
           <a:bodyPr wrap="square" lIns="0" tIns="0" rIns="0" bIns="0" rtlCol="0" anchor="ctr"/>
           <a:lstStyle/>
           <a:p>
-            <a:pPr algn="ctr" indent="0" marL="0">
+            <a:pPr eaLnBrk="0" algn="ctr" indent="0" marL="0">
               <a:buNone/>
             </a:pPr>
             <a:r>
@@ -7953,7 +7953,7 @@
       </p:sp>
       <p:sp>
         <p:nvSpPr>
-          <p:cNvPr id="36" name="S03-figure72" descr="십 칸 틀에 3개"/>
+          <p:cNvPr id="36" name="S03-figure72" descr="1개의 십 칸 틀 중 1번째: 모두 3개"/>
           <p:cNvSpPr/>
           <p:nvPr/>
         </p:nvSpPr>
@@ -7999,7 +7999,7 @@
           <a:bodyPr wrap="square" lIns="0" tIns="0" rIns="0" bIns="0" rtlCol="0" anchor="ctr"/>
           <a:lstStyle/>
           <a:p>
-            <a:pPr algn="ctr" indent="0" marL="0">
+            <a:pPr eaLnBrk="0" algn="ctr" indent="0" marL="0">
               <a:buNone/>
             </a:pPr>
             <a:r>
@@ -8056,7 +8056,7 @@
             </a:lvl1pPr>
           </a:lstStyle>
           <a:p>
-            <a:pPr algn="r"/>
+            <a:pPr eaLnBrk="0" algn="r"/>
             <a:fld id="{F7021451-1387-4CA6-816F-3879F97B5CBC}" type="slidenum">
               <a:rPr b="0" lang="en-US"/>
               <a:t>3</a:t>
@@ -8113,7 +8113,7 @@
           <a:bodyPr wrap="square" lIns="0" tIns="0" rIns="0" bIns="0" rtlCol="0" anchor="ctr"/>
           <a:lstStyle/>
           <a:p>
-            <a:pPr algn="l" indent="0" marL="0">
+            <a:pPr eaLnBrk="0" algn="l" indent="0" marL="0">
               <a:buNone/>
             </a:pPr>
             <a:r>
@@ -8152,7 +8152,7 @@
           <a:bodyPr wrap="square" lIns="0" tIns="0" rIns="0" bIns="0" rtlCol="0" anchor="ctr"/>
           <a:lstStyle/>
           <a:p>
-            <a:pPr algn="l" indent="0" marL="0">
+            <a:pPr eaLnBrk="0" algn="l" indent="0" marL="0">
               <a:buNone/>
             </a:pPr>
             <a:r>
@@ -8218,7 +8218,7 @@
           <a:bodyPr wrap="square" lIns="0" tIns="0" rIns="0" bIns="0" rtlCol="0" anchor="ctr"/>
           <a:lstStyle/>
           <a:p>
-            <a:pPr indent="0" marL="0">
+            <a:pPr eaLnBrk="0" indent="0" marL="0">
               <a:spcAft>
                 <a:spcPts val="600"/>
               </a:spcAft>
@@ -8238,7 +8238,7 @@
             <a:endParaRPr lang="ko-KR" sz="3200" dirty="0"/>
           </a:p>
           <a:p>
-            <a:pPr indent="0" marL="0">
+            <a:pPr eaLnBrk="0" indent="0" marL="0">
               <a:spcAft>
                 <a:spcPts val="600"/>
               </a:spcAft>
@@ -8307,7 +8307,7 @@
           <a:bodyPr wrap="square" lIns="0" tIns="0" rIns="0" bIns="0" rtlCol="0" anchor="ctr"/>
           <a:lstStyle/>
           <a:p>
-            <a:pPr indent="0" marL="0">
+            <a:pPr eaLnBrk="0" indent="0" marL="0">
               <a:spcAft>
                 <a:spcPts val="600"/>
               </a:spcAft>
@@ -8376,7 +8376,7 @@
           <a:bodyPr wrap="square" lIns="0" tIns="0" rIns="0" bIns="0" rtlCol="0" anchor="ctr"/>
           <a:lstStyle/>
           <a:p>
-            <a:pPr indent="0" marL="0">
+            <a:pPr eaLnBrk="0" indent="0" marL="0">
               <a:spcAft>
                 <a:spcPts val="600"/>
               </a:spcAft>
@@ -8763,7 +8763,7 @@
             </a:lvl1pPr>
           </a:lstStyle>
           <a:p>
-            <a:pPr algn="r"/>
+            <a:pPr eaLnBrk="0" algn="r"/>
             <a:fld id="{F7021451-1387-4CA6-816F-3879F97B5CBC}" type="slidenum">
               <a:rPr b="0" lang="en-US"/>
               <a:t>4</a:t>
@@ -8820,7 +8820,7 @@
           <a:bodyPr wrap="square" lIns="0" tIns="0" rIns="0" bIns="0" rtlCol="0" anchor="ctr"/>
           <a:lstStyle/>
           <a:p>
-            <a:pPr algn="l" indent="0" marL="0">
+            <a:pPr eaLnBrk="0" algn="l" indent="0" marL="0">
               <a:buNone/>
             </a:pPr>
             <a:r>
@@ -8859,7 +8859,7 @@
           <a:bodyPr wrap="square" lIns="0" tIns="0" rIns="0" bIns="0" rtlCol="0" anchor="ctr"/>
           <a:lstStyle/>
           <a:p>
-            <a:pPr algn="l" indent="0" marL="0">
+            <a:pPr eaLnBrk="0" algn="l" indent="0" marL="0">
               <a:buNone/>
             </a:pPr>
             <a:r>
@@ -8904,7 +8904,7 @@
           <a:bodyPr wrap="square" lIns="0" tIns="0" rIns="0" bIns="0" rtlCol="0" anchor="ctr"/>
           <a:lstStyle/>
           <a:p>
-            <a:pPr algn="ctr" indent="0" marL="0">
+            <a:pPr eaLnBrk="0" algn="ctr" indent="0" marL="0">
               <a:buNone/>
             </a:pPr>
             <a:r>
@@ -8943,7 +8943,7 @@
           <a:bodyPr wrap="square" lIns="0" tIns="0" rIns="0" bIns="0" rtlCol="0" anchor="t"/>
           <a:lstStyle/>
           <a:p>
-            <a:pPr algn="l" indent="0" marL="0">
+            <a:pPr eaLnBrk="0" algn="l" indent="0" marL="0">
               <a:buNone/>
             </a:pPr>
             <a:r>
@@ -8988,7 +8988,7 @@
           <a:bodyPr wrap="square" lIns="0" tIns="0" rIns="0" bIns="0" rtlCol="0" anchor="ctr"/>
           <a:lstStyle/>
           <a:p>
-            <a:pPr algn="ctr" indent="0" marL="0">
+            <a:pPr eaLnBrk="0" algn="ctr" indent="0" marL="0">
               <a:buNone/>
             </a:pPr>
             <a:r>
@@ -9027,7 +9027,7 @@
           <a:bodyPr wrap="square" lIns="0" tIns="0" rIns="0" bIns="0" rtlCol="0" anchor="t"/>
           <a:lstStyle/>
           <a:p>
-            <a:pPr algn="l" indent="0" marL="0">
+            <a:pPr eaLnBrk="0" algn="l" indent="0" marL="0">
               <a:buNone/>
             </a:pPr>
             <a:r>
@@ -9072,7 +9072,7 @@
           <a:bodyPr wrap="square" lIns="0" tIns="0" rIns="0" bIns="0" rtlCol="0" anchor="ctr"/>
           <a:lstStyle/>
           <a:p>
-            <a:pPr algn="ctr" indent="0" marL="0">
+            <a:pPr eaLnBrk="0" algn="ctr" indent="0" marL="0">
               <a:buNone/>
             </a:pPr>
             <a:r>
@@ -9111,7 +9111,7 @@
           <a:bodyPr wrap="square" lIns="0" tIns="0" rIns="0" bIns="0" rtlCol="0" anchor="t"/>
           <a:lstStyle/>
           <a:p>
-            <a:pPr algn="l" indent="0" marL="0">
+            <a:pPr eaLnBrk="0" algn="l" indent="0" marL="0">
               <a:buNone/>
             </a:pPr>
             <a:r>
@@ -9156,7 +9156,7 @@
           <a:bodyPr wrap="square" lIns="0" tIns="0" rIns="0" bIns="0" rtlCol="0" anchor="ctr"/>
           <a:lstStyle/>
           <a:p>
-            <a:pPr algn="ctr" indent="0" marL="0">
+            <a:pPr eaLnBrk="0" algn="ctr" indent="0" marL="0">
               <a:buNone/>
             </a:pPr>
             <a:r>
@@ -9195,7 +9195,7 @@
           <a:bodyPr wrap="square" lIns="0" tIns="0" rIns="0" bIns="0" rtlCol="0" anchor="t"/>
           <a:lstStyle/>
           <a:p>
-            <a:pPr algn="l" indent="0" marL="0">
+            <a:pPr eaLnBrk="0" algn="l" indent="0" marL="0">
               <a:buNone/>
             </a:pPr>
             <a:r>
@@ -9252,7 +9252,7 @@
             </a:lvl1pPr>
           </a:lstStyle>
           <a:p>
-            <a:pPr algn="r"/>
+            <a:pPr eaLnBrk="0" algn="r"/>
             <a:fld id="{F7021451-1387-4CA6-816F-3879F97B5CBC}" type="slidenum">
               <a:rPr b="0" lang="en-US"/>
               <a:t>5</a:t>
@@ -9309,7 +9309,7 @@
           <a:bodyPr wrap="square" lIns="0" tIns="0" rIns="0" bIns="0" rtlCol="0" anchor="ctr"/>
           <a:lstStyle/>
           <a:p>
-            <a:pPr algn="l" indent="0" marL="0">
+            <a:pPr eaLnBrk="0" algn="l" indent="0" marL="0">
               <a:buNone/>
             </a:pPr>
             <a:r>
@@ -9348,7 +9348,7 @@
           <a:bodyPr wrap="square" lIns="0" tIns="0" rIns="0" bIns="0" rtlCol="0" anchor="ctr"/>
           <a:lstStyle/>
           <a:p>
-            <a:pPr algn="l" indent="0" marL="0">
+            <a:pPr eaLnBrk="0" algn="l" indent="0" marL="0">
               <a:buNone/>
             </a:pPr>
             <a:r>
@@ -9387,7 +9387,7 @@
           <a:bodyPr wrap="square" lIns="0" tIns="0" rIns="0" bIns="0" rtlCol="0" anchor="ctr"/>
           <a:lstStyle/>
           <a:p>
-            <a:pPr algn="ctr" indent="0" marL="0">
+            <a:pPr eaLnBrk="0" algn="ctr" indent="0" marL="0">
               <a:buNone/>
             </a:pPr>
             <a:r>
@@ -9404,7 +9404,7 @@
             <a:endParaRPr lang="ko-KR" sz="3600" dirty="0"/>
           </a:p>
           <a:p>
-            <a:pPr algn="ctr" indent="0" marL="0">
+            <a:pPr eaLnBrk="0" algn="ctr" indent="0" marL="0">
               <a:buNone/>
             </a:pPr>
             <a:r>
@@ -9421,7 +9421,7 @@
             <a:endParaRPr lang="ko-KR" sz="3600" dirty="0"/>
           </a:p>
           <a:p>
-            <a:pPr algn="ctr" indent="0" marL="0">
+            <a:pPr eaLnBrk="0" algn="ctr" indent="0" marL="0">
               <a:buNone/>
             </a:pPr>
             <a:r>
@@ -9466,7 +9466,7 @@
           <a:bodyPr wrap="square" lIns="0" tIns="0" rIns="0" bIns="0" rtlCol="0" anchor="ctr"/>
           <a:lstStyle/>
           <a:p>
-            <a:pPr algn="ctr" indent="0" marL="0">
+            <a:pPr eaLnBrk="0" algn="ctr" indent="0" marL="0">
               <a:buNone/>
             </a:pPr>
             <a:r>
@@ -9505,7 +9505,7 @@
           <a:bodyPr wrap="square" lIns="0" tIns="0" rIns="0" bIns="0" rtlCol="0" anchor="t"/>
           <a:lstStyle/>
           <a:p>
-            <a:pPr algn="l" indent="0" marL="0">
+            <a:pPr eaLnBrk="0" algn="l" indent="0" marL="0">
               <a:buNone/>
             </a:pPr>
             <a:r>
@@ -9550,7 +9550,7 @@
           <a:bodyPr wrap="square" lIns="0" tIns="0" rIns="0" bIns="0" rtlCol="0" anchor="ctr"/>
           <a:lstStyle/>
           <a:p>
-            <a:pPr algn="ctr" indent="0" marL="0">
+            <a:pPr eaLnBrk="0" algn="ctr" indent="0" marL="0">
               <a:buNone/>
             </a:pPr>
             <a:r>
@@ -9589,7 +9589,7 @@
           <a:bodyPr wrap="square" lIns="0" tIns="0" rIns="0" bIns="0" rtlCol="0" anchor="t"/>
           <a:lstStyle/>
           <a:p>
-            <a:pPr algn="l" indent="0" marL="0">
+            <a:pPr eaLnBrk="0" algn="l" indent="0" marL="0">
               <a:buNone/>
             </a:pPr>
             <a:r>
@@ -9634,7 +9634,7 @@
           <a:bodyPr wrap="square" lIns="0" tIns="0" rIns="0" bIns="0" rtlCol="0" anchor="ctr"/>
           <a:lstStyle/>
           <a:p>
-            <a:pPr algn="ctr" indent="0" marL="0">
+            <a:pPr eaLnBrk="0" algn="ctr" indent="0" marL="0">
               <a:buNone/>
             </a:pPr>
             <a:r>
@@ -9673,7 +9673,7 @@
           <a:bodyPr wrap="square" lIns="0" tIns="0" rIns="0" bIns="0" rtlCol="0" anchor="t"/>
           <a:lstStyle/>
           <a:p>
-            <a:pPr algn="l" indent="0" marL="0">
+            <a:pPr eaLnBrk="0" algn="l" indent="0" marL="0">
               <a:buNone/>
             </a:pPr>
             <a:r>
@@ -9730,7 +9730,7 @@
             </a:lvl1pPr>
           </a:lstStyle>
           <a:p>
-            <a:pPr algn="r"/>
+            <a:pPr eaLnBrk="0" algn="r"/>
             <a:fld id="{F7021451-1387-4CA6-816F-3879F97B5CBC}" type="slidenum">
               <a:rPr b="0" lang="en-US"/>
               <a:t>6</a:t>
@@ -9787,7 +9787,7 @@
           <a:bodyPr wrap="square" lIns="0" tIns="0" rIns="0" bIns="0" rtlCol="0" anchor="ctr"/>
           <a:lstStyle/>
           <a:p>
-            <a:pPr algn="l" indent="0" marL="0">
+            <a:pPr eaLnBrk="0" algn="l" indent="0" marL="0">
               <a:buNone/>
             </a:pPr>
             <a:r>
@@ -9826,7 +9826,7 @@
           <a:bodyPr wrap="square" lIns="0" tIns="0" rIns="0" bIns="0" rtlCol="0" anchor="ctr"/>
           <a:lstStyle/>
           <a:p>
-            <a:pPr algn="l" indent="0" marL="0">
+            <a:pPr eaLnBrk="0" algn="l" indent="0" marL="0">
               <a:buNone/>
             </a:pPr>
             <a:r>
@@ -9892,7 +9892,7 @@
           <a:bodyPr wrap="square" lIns="0" tIns="0" rIns="0" bIns="0" rtlCol="0" anchor="ctr"/>
           <a:lstStyle/>
           <a:p>
-            <a:pPr indent="0" marL="0">
+            <a:pPr eaLnBrk="0" indent="0" marL="0">
               <a:spcAft>
                 <a:spcPts val="600"/>
               </a:spcAft>
@@ -9942,7 +9942,7 @@
           <a:bodyPr wrap="square" lIns="0" tIns="0" rIns="0" bIns="0" rtlCol="0" anchor="ctr"/>
           <a:lstStyle/>
           <a:p>
-            <a:pPr algn="ctr" indent="0" marL="0">
+            <a:pPr eaLnBrk="0" algn="ctr" indent="0" marL="0">
               <a:buNone/>
             </a:pPr>
             <a:r>
@@ -9981,7 +9981,7 @@
           <a:bodyPr wrap="square" lIns="0" tIns="0" rIns="0" bIns="0" rtlCol="0" anchor="ctr"/>
           <a:lstStyle/>
           <a:p>
-            <a:pPr algn="l" indent="0" marL="0">
+            <a:pPr eaLnBrk="0" algn="l" indent="0" marL="0">
               <a:buNone/>
             </a:pPr>
             <a:r>
@@ -10028,7 +10028,7 @@
           <a:bodyPr wrap="square" lIns="0" tIns="0" rIns="0" bIns="0" rtlCol="0" anchor="ctr"/>
           <a:lstStyle/>
           <a:p>
-            <a:pPr algn="ctr" indent="0" marL="0">
+            <a:pPr eaLnBrk="0" algn="ctr" indent="0" marL="0">
               <a:buNone/>
             </a:pPr>
             <a:r>
@@ -10067,7 +10067,7 @@
           <a:bodyPr wrap="square" lIns="0" tIns="0" rIns="0" bIns="0" rtlCol="0" anchor="ctr"/>
           <a:lstStyle/>
           <a:p>
-            <a:pPr algn="l" indent="0" marL="0">
+            <a:pPr eaLnBrk="0" algn="l" indent="0" marL="0">
               <a:buNone/>
             </a:pPr>
             <a:r>
@@ -10114,7 +10114,7 @@
           <a:bodyPr wrap="square" lIns="0" tIns="0" rIns="0" bIns="0" rtlCol="0" anchor="ctr"/>
           <a:lstStyle/>
           <a:p>
-            <a:pPr algn="ctr" indent="0" marL="0">
+            <a:pPr eaLnBrk="0" algn="ctr" indent="0" marL="0">
               <a:buNone/>
             </a:pPr>
             <a:r>
@@ -10153,7 +10153,7 @@
           <a:bodyPr wrap="square" lIns="0" tIns="0" rIns="0" bIns="0" rtlCol="0" anchor="ctr"/>
           <a:lstStyle/>
           <a:p>
-            <a:pPr algn="l" indent="0" marL="0">
+            <a:pPr eaLnBrk="0" algn="l" indent="0" marL="0">
               <a:buNone/>
             </a:pPr>
             <a:r>
@@ -10210,7 +10210,7 @@
             </a:lvl1pPr>
           </a:lstStyle>
           <a:p>
-            <a:pPr algn="r"/>
+            <a:pPr eaLnBrk="0" algn="r"/>
             <a:fld id="{F7021451-1387-4CA6-816F-3879F97B5CBC}" type="slidenum">
               <a:rPr b="0" lang="en-US"/>
               <a:t>7</a:t>
@@ -10267,7 +10267,7 @@
           <a:bodyPr wrap="square" lIns="0" tIns="0" rIns="0" bIns="0" rtlCol="0" anchor="ctr"/>
           <a:lstStyle/>
           <a:p>
-            <a:pPr algn="l" indent="0" marL="0">
+            <a:pPr eaLnBrk="0" algn="l" indent="0" marL="0">
               <a:buNone/>
             </a:pPr>
             <a:r>
@@ -10333,7 +10333,7 @@
           <a:bodyPr wrap="square" lIns="0" tIns="0" rIns="0" bIns="0" rtlCol="0" anchor="ctr"/>
           <a:lstStyle/>
           <a:p>
-            <a:pPr indent="0" marL="0">
+            <a:pPr eaLnBrk="0" indent="0" marL="0">
               <a:spcAft>
                 <a:spcPts val="600"/>
               </a:spcAft>
@@ -10383,7 +10383,7 @@
           <a:bodyPr wrap="square" lIns="0" tIns="0" rIns="0" bIns="0" rtlCol="0" anchor="ctr"/>
           <a:lstStyle/>
           <a:p>
-            <a:pPr algn="ctr" indent="0" marL="0">
+            <a:pPr eaLnBrk="0" algn="ctr" indent="0" marL="0">
               <a:buNone/>
             </a:pPr>
             <a:r>
@@ -10422,7 +10422,7 @@
           <a:bodyPr wrap="square" lIns="0" tIns="0" rIns="0" bIns="0" rtlCol="0" anchor="ctr"/>
           <a:lstStyle/>
           <a:p>
-            <a:pPr algn="l" indent="0" marL="0">
+            <a:pPr eaLnBrk="0" algn="l" indent="0" marL="0">
               <a:buNone/>
             </a:pPr>
             <a:r>
@@ -10469,7 +10469,7 @@
           <a:bodyPr wrap="square" lIns="0" tIns="0" rIns="0" bIns="0" rtlCol="0" anchor="ctr"/>
           <a:lstStyle/>
           <a:p>
-            <a:pPr algn="ctr" indent="0" marL="0">
+            <a:pPr eaLnBrk="0" algn="ctr" indent="0" marL="0">
               <a:buNone/>
             </a:pPr>
             <a:r>
@@ -10508,7 +10508,7 @@
           <a:bodyPr wrap="square" lIns="0" tIns="0" rIns="0" bIns="0" rtlCol="0" anchor="ctr"/>
           <a:lstStyle/>
           <a:p>
-            <a:pPr algn="l" indent="0" marL="0">
+            <a:pPr eaLnBrk="0" algn="l" indent="0" marL="0">
               <a:buNone/>
             </a:pPr>
             <a:r>
@@ -10555,7 +10555,7 @@
           <a:bodyPr wrap="square" lIns="0" tIns="0" rIns="0" bIns="0" rtlCol="0" anchor="ctr"/>
           <a:lstStyle/>
           <a:p>
-            <a:pPr algn="ctr" indent="0" marL="0">
+            <a:pPr eaLnBrk="0" algn="ctr" indent="0" marL="0">
               <a:buNone/>
             </a:pPr>
             <a:r>
@@ -10594,7 +10594,7 @@
           <a:bodyPr wrap="square" lIns="0" tIns="0" rIns="0" bIns="0" rtlCol="0" anchor="ctr"/>
           <a:lstStyle/>
           <a:p>
-            <a:pPr algn="l" indent="0" marL="0">
+            <a:pPr eaLnBrk="0" algn="l" indent="0" marL="0">
               <a:buNone/>
             </a:pPr>
             <a:r>
@@ -10641,7 +10641,7 @@
           <a:bodyPr wrap="square" lIns="0" tIns="0" rIns="0" bIns="0" rtlCol="0" anchor="ctr"/>
           <a:lstStyle/>
           <a:p>
-            <a:pPr algn="ctr" indent="0" marL="0">
+            <a:pPr eaLnBrk="0" algn="ctr" indent="0" marL="0">
               <a:buNone/>
             </a:pPr>
             <a:r>
@@ -10680,7 +10680,7 @@
           <a:bodyPr wrap="square" lIns="0" tIns="0" rIns="0" bIns="0" rtlCol="0" anchor="ctr"/>
           <a:lstStyle/>
           <a:p>
-            <a:pPr algn="l" indent="0" marL="0">
+            <a:pPr eaLnBrk="0" algn="l" indent="0" marL="0">
               <a:buNone/>
             </a:pPr>
             <a:r>
@@ -10737,7 +10737,7 @@
             </a:lvl1pPr>
           </a:lstStyle>
           <a:p>
-            <a:pPr algn="r"/>
+            <a:pPr eaLnBrk="0" algn="r"/>
             <a:fld id="{F7021451-1387-4CA6-816F-3879F97B5CBC}" type="slidenum">
               <a:rPr b="0" lang="en-US"/>
               <a:t>8</a:t>
@@ -10794,7 +10794,7 @@
           <a:bodyPr wrap="square" lIns="0" tIns="0" rIns="0" bIns="0" rtlCol="0" anchor="ctr"/>
           <a:lstStyle/>
           <a:p>
-            <a:pPr algn="l" indent="0" marL="0">
+            <a:pPr eaLnBrk="0" algn="l" indent="0" marL="0">
               <a:buNone/>
             </a:pPr>
             <a:r>
@@ -10860,7 +10860,7 @@
           <a:bodyPr wrap="square" lIns="0" tIns="0" rIns="0" bIns="0" rtlCol="0" anchor="ctr"/>
           <a:lstStyle/>
           <a:p>
-            <a:pPr indent="0" marL="0">
+            <a:pPr eaLnBrk="0" indent="0" marL="0">
               <a:spcAft>
                 <a:spcPts val="600"/>
               </a:spcAft>
@@ -10880,7 +10880,7 @@
             <a:endParaRPr lang="ko-KR" sz="3200" dirty="0"/>
           </a:p>
           <a:p>
-            <a:pPr indent="0" marL="0">
+            <a:pPr eaLnBrk="0" indent="0" marL="0">
               <a:spcAft>
                 <a:spcPts val="600"/>
               </a:spcAft>
@@ -10949,7 +10949,7 @@
           <a:bodyPr wrap="square" lIns="0" tIns="0" rIns="0" bIns="0" rtlCol="0" anchor="ctr"/>
           <a:lstStyle/>
           <a:p>
-            <a:pPr indent="0" marL="0">
+            <a:pPr eaLnBrk="0" indent="0" marL="0">
               <a:spcAft>
                 <a:spcPts val="600"/>
               </a:spcAft>
@@ -10999,7 +10999,7 @@
           <a:bodyPr wrap="square" lIns="177800" tIns="0" rIns="177800" bIns="0" rtlCol="0" anchor="ctr"/>
           <a:lstStyle/>
           <a:p>
-            <a:pPr algn="l" indent="0" marL="0">
+            <a:pPr eaLnBrk="0" algn="l" indent="0" marL="0">
               <a:buNone/>
             </a:pPr>
             <a:r>
@@ -11038,7 +11038,7 @@
           <a:bodyPr wrap="square" lIns="0" tIns="0" rIns="0" bIns="0" rtlCol="0" anchor="ctr"/>
           <a:lstStyle/>
           <a:p>
-            <a:pPr algn="ctr" indent="0" marL="0">
+            <a:pPr eaLnBrk="0" algn="ctr" indent="0" marL="0">
               <a:buNone/>
             </a:pPr>
             <a:r>
@@ -11085,7 +11085,7 @@
           <a:bodyPr wrap="square" lIns="177800" tIns="0" rIns="177800" bIns="0" rtlCol="0" anchor="ctr"/>
           <a:lstStyle/>
           <a:p>
-            <a:pPr algn="l" indent="0" marL="0">
+            <a:pPr eaLnBrk="0" algn="l" indent="0" marL="0">
               <a:buNone/>
             </a:pPr>
             <a:r>
@@ -11124,7 +11124,7 @@
           <a:bodyPr wrap="square" lIns="0" tIns="0" rIns="0" bIns="0" rtlCol="0" anchor="ctr"/>
           <a:lstStyle/>
           <a:p>
-            <a:pPr algn="ctr" indent="0" marL="0">
+            <a:pPr eaLnBrk="0" algn="ctr" indent="0" marL="0">
               <a:buNone/>
             </a:pPr>
             <a:r>
@@ -11181,7 +11181,7 @@
             </a:lvl1pPr>
           </a:lstStyle>
           <a:p>
-            <a:pPr algn="r"/>
+            <a:pPr eaLnBrk="0" algn="r"/>
             <a:fld id="{F7021451-1387-4CA6-816F-3879F97B5CBC}" type="slidenum">
               <a:rPr b="0" lang="en-US"/>
               <a:t>9</a:t>

--- a/dist/초1/수학/수와연산/초1_수학_수와연산_05_뺄셈의뜻.pptx
+++ b/dist/초1/수학/수와연산/초1_수학_수와연산_05_뺄셈의뜻.pptx
@@ -120,13 +120,13 @@
   <p:extLst>
     <p:ext uri="{521415D9-36F7-43E2-AB2F-B90AF26B5E84}">
       <p14:sectionLst xmlns:p14="http://schemas.microsoft.com/office/powerpoint/2010/main">
-        <p14:section name="도입" id="{702e80ea-35eb-654e-c951-4d329e917af5}">
+        <p14:section name="도입" id="{46c7d211-693d-fd9d-9125-5a17d6b66f5f}">
           <p14:sldIdLst>
             <p14:sldId id="256"/>
             <p14:sldId id="257"/>
           </p14:sldIdLst>
         </p14:section>
-        <p14:section name="개념" id="{b0cbc581-5214-e7a0-3342-fe6ac15e10b2}">
+        <p14:section name="개념" id="{e0ec27e0-5812-12ae-a45e-467ef46c3b42}">
           <p14:sldIdLst>
             <p14:sldId id="258"/>
             <p14:sldId id="259"/>
@@ -134,26 +134,26 @@
             <p14:sldId id="261"/>
           </p14:sldIdLst>
         </p14:section>
-        <p14:section name="연습" id="{e83c05cd-fe48-7b6f-cfd3-a759d6728520}">
+        <p14:section name="연습" id="{3a8a280a-7a0b-f81e-7b41-f9a6c3c88769}">
           <p14:sldIdLst>
             <p14:sldId id="262"/>
             <p14:sldId id="263"/>
             <p14:sldId id="264"/>
           </p14:sldIdLst>
         </p14:section>
-        <p14:section name="확인" id="{108719f7-e07e-ca68-8ee2-4f1a37428207}">
+        <p14:section name="확인" id="{b7ea136f-6fcd-ac54-a6ae-c244756bee2b}">
           <p14:sldIdLst>
             <p14:sldId id="265"/>
             <p14:sldId id="266"/>
             <p14:sldId id="267"/>
           </p14:sldIdLst>
         </p14:section>
-        <p14:section name="정리" id="{9ba7e1dc-2163-84cd-8485-0b27b0e5f603}">
+        <p14:section name="정리" id="{5a7ff76c-63a3-9c48-5df3-09c37914c4ba}">
           <p14:sldIdLst>
             <p14:sldId id="268"/>
           </p14:sldIdLst>
         </p14:section>
-        <p14:section name="보충" id="{851ba62e-7030-1284-2644-c0682fdf5720}">
+        <p14:section name="보충" id="{d23d909a-a9b2-a7e9-eaa6-216ee4cec8a7}">
           <p14:sldIdLst>
             <p14:sldId id="269"/>
           </p14:sldIdLst>
@@ -6831,7 +6831,7 @@
         </p:nvSpPr>
         <p:spPr>
           <a:xfrm>
-            <a:off x="548640" y="5157216"/>
+            <a:off x="548640" y="5180076"/>
             <a:ext cx="566928" cy="566928"/>
           </a:xfrm>
           <a:prstGeom prst="roundRect">
@@ -6879,7 +6879,7 @@
         <p:spPr>
           <a:xfrm>
             <a:off x="1344168" y="4709160"/>
-            <a:ext cx="4206240" cy="1463040"/>
+            <a:ext cx="5486400" cy="1508760"/>
           </a:xfrm>
           <a:prstGeom prst="rect">
             <a:avLst/>
@@ -6895,7 +6895,7 @@
               <a:buNone/>
             </a:pPr>
             <a:r>
-              <a:rPr lang="ko-KR" altLang="en-US" sz="2600" b="1" dirty="0">
+              <a:rPr lang="ko-KR" altLang="en-US" sz="3200" b="1" dirty="0">
                 <a:solidFill>
                   <a:srgbClr val="1F2937"/>
                 </a:solidFill>
@@ -6905,14 +6905,14 @@
               </a:rPr>
               <a:t>8</a:t>
             </a:r>
-            <a:endParaRPr lang="ko-KR" sz="2600" dirty="0"/>
+            <a:endParaRPr lang="ko-KR" sz="3200" dirty="0"/>
           </a:p>
           <a:p>
             <a:pPr eaLnBrk="0" algn="ctr" indent="0" marL="0">
               <a:buNone/>
             </a:pPr>
             <a:r>
-              <a:rPr lang="ko-KR" altLang="en-US" sz="2600" b="1" dirty="0">
+              <a:rPr lang="ko-KR" altLang="en-US" sz="3200" b="1" dirty="0">
                 <a:solidFill>
                   <a:srgbClr val="1F2937"/>
                 </a:solidFill>
@@ -6922,14 +6922,14 @@
               </a:rPr>
               <a:t>↙    ↘</a:t>
             </a:r>
-            <a:endParaRPr lang="ko-KR" sz="2600" dirty="0"/>
+            <a:endParaRPr lang="ko-KR" sz="3200" dirty="0"/>
           </a:p>
           <a:p>
             <a:pPr eaLnBrk="0" algn="ctr" indent="0" marL="0">
               <a:buNone/>
             </a:pPr>
             <a:r>
-              <a:rPr lang="ko-KR" altLang="en-US" sz="2600" b="1" dirty="0">
+              <a:rPr lang="ko-KR" altLang="en-US" sz="3200" b="1" dirty="0">
                 <a:solidFill>
                   <a:srgbClr val="1F2937"/>
                 </a:solidFill>
@@ -6939,7 +6939,7 @@
               </a:rPr>
               <a:t>5        □</a:t>
             </a:r>
-            <a:endParaRPr lang="ko-KR" sz="2600" dirty="0"/>
+            <a:endParaRPr lang="ko-KR" sz="3200" dirty="0"/>
           </a:p>
         </p:txBody>
       </p:sp>

--- a/dist/초1/수학/수와연산/초1_수학_수와연산_05_뺄셈의뜻.pptx
+++ b/dist/초1/수학/수와연산/초1_수학_수와연산_05_뺄셈의뜻.pptx
@@ -120,13 +120,13 @@
   <p:extLst>
     <p:ext uri="{521415D9-36F7-43E2-AB2F-B90AF26B5E84}">
       <p14:sectionLst xmlns:p14="http://schemas.microsoft.com/office/powerpoint/2010/main">
-        <p14:section name="도입" id="{46c7d211-693d-fd9d-9125-5a17d6b66f5f}">
+        <p14:section name="도입" id="{0663eddd-90f7-eb3f-23b6-5ae539036139}">
           <p14:sldIdLst>
             <p14:sldId id="256"/>
             <p14:sldId id="257"/>
           </p14:sldIdLst>
         </p14:section>
-        <p14:section name="개념" id="{e0ec27e0-5812-12ae-a45e-467ef46c3b42}">
+        <p14:section name="개념" id="{e42e4717-d400-b894-9022-9e07d3336f77}">
           <p14:sldIdLst>
             <p14:sldId id="258"/>
             <p14:sldId id="259"/>
@@ -134,26 +134,26 @@
             <p14:sldId id="261"/>
           </p14:sldIdLst>
         </p14:section>
-        <p14:section name="연습" id="{3a8a280a-7a0b-f81e-7b41-f9a6c3c88769}">
+        <p14:section name="연습" id="{93fd4a4b-5e64-50be-a4e2-245ce8acefb6}">
           <p14:sldIdLst>
             <p14:sldId id="262"/>
             <p14:sldId id="263"/>
             <p14:sldId id="264"/>
           </p14:sldIdLst>
         </p14:section>
-        <p14:section name="확인" id="{b7ea136f-6fcd-ac54-a6ae-c244756bee2b}">
+        <p14:section name="확인" id="{e9e2e400-7ed1-c2f4-9ded-943132bab8d6}">
           <p14:sldIdLst>
             <p14:sldId id="265"/>
             <p14:sldId id="266"/>
             <p14:sldId id="267"/>
           </p14:sldIdLst>
         </p14:section>
-        <p14:section name="정리" id="{5a7ff76c-63a3-9c48-5df3-09c37914c4ba}">
+        <p14:section name="정리" id="{5b7e58ec-7b96-e7ca-8bfd-ab252fbf2802}">
           <p14:sldIdLst>
             <p14:sldId id="268"/>
           </p14:sldIdLst>
         </p14:section>
-        <p14:section name="보충" id="{d23d909a-a9b2-a7e9-eaa6-216ee4cec8a7}">
+        <p14:section name="보충" id="{fb4571d4-330c-424d-5c63-482efa5de971}">
           <p14:sldIdLst>
             <p14:sldId id="269"/>
           </p14:sldIdLst>
